--- a/whimzmaxx/decks/Storyboard-Circle-Their-Ad.pptx
+++ b/whimzmaxx/decks/Storyboard-Circle-Their-Ad.pptx
@@ -116,7 +116,7 @@
   <p:extLst>
     <p:ext uri="{521415D9-36F7-43E2-AB2F-B90AF26B5E84}">
       <p14:sectionLst xmlns:p14="http://schemas.microsoft.com/office/powerpoint/2010/main">
-        <p14:section name="Storyboard: circle their ad" id="{93e4fb0a-95a9-7add-ed09-c14941fc0b9c}">
+        <p14:section name="Storyboard: circle their ad" id="{227a44bf-9042-dcf5-91fb-29d521b806c4}">
           <p14:sldIdLst>
             <p14:sldId id="256"/>
             <p14:sldId id="257"/>
@@ -710,7 +710,7 @@
           <a:p>
             <a:r>
               <a:rPr lang="en-US" dirty="0"/>
-              <a:t>Their frame at 0:00–0:05, from the frame-by-frame read in "A Duct Tape Commercial". Production: freeze their frame, Captain draws the red circle by hand on the phone (finger, not a generated graphic), VO over it. The hole line is the on-screen caption.</a:t>
+              <a:t>Their frame at 0:01–0:05, from the frame-by-frame read in "A Duct Tape Commercial". Production: freeze their frame, Captain draws the red circle by hand on the phone (finger, not a generated graphic), VO over it. The hole line is the on-screen caption.</a:t>
             </a:r>
             <a:endParaRPr lang="en-US" dirty="0"/>
           </a:p>
@@ -798,7 +798,7 @@
           <a:p>
             <a:r>
               <a:rPr lang="en-US" dirty="0"/>
-              <a:t>Their frame at 0:19–0:33, from the frame-by-frame read in "A Duct Tape Commercial". Production: freeze their frame, Captain draws the red circle by hand on the phone (finger, not a generated graphic), VO over it. The hole line is the on-screen caption.</a:t>
+              <a:t>Their frame at 0:18–0:23, from the frame-by-frame read in "A Duct Tape Commercial". Production: freeze their frame, Captain draws the red circle by hand on the phone (finger, not a generated graphic), VO over it. The hole line is the on-screen caption.</a:t>
             </a:r>
             <a:endParaRPr lang="en-US" dirty="0"/>
           </a:p>
@@ -886,7 +886,7 @@
           <a:p>
             <a:r>
               <a:rPr lang="en-US" dirty="0"/>
-              <a:t>Their frame at 0:34–0:40, from the frame-by-frame read in "A Duct Tape Commercial". Production: freeze their frame, Captain draws the red circle by hand on the phone (finger, not a generated graphic), VO over it. The hole line is the on-screen caption.</a:t>
+              <a:t>Their frame at 0:38–0:42, from the frame-by-frame read in "A Duct Tape Commercial". Production: freeze their frame, Captain draws the red circle by hand on the phone (finger, not a generated graphic), VO over it. The hole line is the on-screen caption.</a:t>
             </a:r>
             <a:endParaRPr lang="en-US" dirty="0"/>
           </a:p>
@@ -974,7 +974,7 @@
           <a:p>
             <a:r>
               <a:rPr lang="en-US" dirty="0"/>
-              <a:t>Their frame at 0:41–0:50, from the frame-by-frame read in "A Duct Tape Commercial". Production: freeze their frame, Captain draws the red circle by hand on the phone (finger, not a generated graphic), VO over it. The hole line is the on-screen caption.</a:t>
+              <a:t>Their frame at 0:47–0:52, from the frame-by-frame read in "A Duct Tape Commercial". Production: freeze their frame, Captain draws the red circle by hand on the phone (finger, not a generated graphic), VO over it. The hole line is the on-screen caption.</a:t>
             </a:r>
             <a:endParaRPr lang="en-US" dirty="0"/>
           </a:p>
@@ -1062,7 +1062,7 @@
           <a:p>
             <a:r>
               <a:rPr lang="en-US" dirty="0"/>
-              <a:t>Their frame at 0:51–0:66, from the frame-by-frame read in "A Duct Tape Commercial". Production: freeze their frame, Captain draws the red circle by hand on the phone (finger, not a generated graphic), VO over it. The hole line is the on-screen caption.</a:t>
+              <a:t>Their frame at 0:58–0:65, from the frame-by-frame read in "A Duct Tape Commercial". Production: freeze their frame, Captain draws the red circle by hand on the phone (finger, not a generated graphic), VO over it. The hole line is the on-screen caption.</a:t>
             </a:r>
             <a:endParaRPr lang="en-US" dirty="0"/>
           </a:p>
@@ -1150,7 +1150,7 @@
           <a:p>
             <a:r>
               <a:rPr lang="en-US" dirty="0"/>
-              <a:t>Their frame at 0:67, from the frame-by-frame read in "A Duct Tape Commercial". Production: freeze their frame, Captain draws the red circle by hand on the phone (finger, not a generated graphic), VO over it. The hole line is the on-screen caption.</a:t>
+              <a:t>Their frame at 0:66–0:67, from the frame-by-frame read in "A Duct Tape Commercial". Production: freeze their frame, Captain draws the red circle by hand on the phone (finger, not a generated graphic), VO over it. The hole line is the on-screen caption.</a:t>
             </a:r>
             <a:endParaRPr lang="en-US" dirty="0"/>
           </a:p>
@@ -2164,7 +2164,7 @@
                 <a:ea typeface="Century Schoolbook" pitchFamily="34" charset="-122"/>
                 <a:cs typeface="Century Schoolbook" pitchFamily="34" charset="-120"/>
               </a:rPr>
-              <a:t>Shot 1 · their 0:00–0:05</a:t>
+              <a:t>Shot 1 · their 0:01–0:05</a:t>
             </a:r>
             <a:endParaRPr lang="en-US" sz="2200" dirty="0"/>
           </a:p>
@@ -2227,7 +2227,7 @@
                   <a:schemeClr val="bg1"/>
                 </a:solidFill>
               </a:rPr>
-              <a:t>Their open: “the first AI that works” · “AI was supposed to…”</a:t>
+              <a:t>“This is the first AI tool that works the way AI was actually supposed to”</a:t>
             </a:r>
             <a:endParaRPr lang="en-US" sz="1100" dirty="0"/>
           </a:p>
@@ -2610,7 +2610,7 @@
                 <a:ea typeface="Century Schoolbook" pitchFamily="34" charset="-122"/>
                 <a:cs typeface="Century Schoolbook" pitchFamily="34" charset="-120"/>
               </a:rPr>
-              <a:t>Shot 2 · their 0:19–0:33</a:t>
+              <a:t>Shot 2 · their 0:18–0:23</a:t>
             </a:r>
             <a:endParaRPr lang="en-US" sz="2200" dirty="0"/>
           </a:p>
@@ -2673,7 +2673,7 @@
                   <a:schemeClr val="bg1"/>
                 </a:solidFill>
               </a:rPr>
-              <a:t>“orchestrates 19 AI models” — Gemini, Grok, Nano Banana, Claude</a:t>
+              <a:t>“breaks it down into parallel subtasks and orchestrates 19 specialized AI models”</a:t>
             </a:r>
             <a:endParaRPr lang="en-US" sz="1100" dirty="0"/>
           </a:p>
@@ -3056,7 +3056,7 @@
                 <a:ea typeface="Century Schoolbook" pitchFamily="34" charset="-122"/>
                 <a:cs typeface="Century Schoolbook" pitchFamily="34" charset="-120"/>
               </a:rPr>
-              <a:t>Shot 3 · their 0:34–0:40</a:t>
+              <a:t>Shot 3 · their 0:38–0:42</a:t>
             </a:r>
             <a:endParaRPr lang="en-US" sz="2200" dirty="0"/>
           </a:p>
@@ -3119,7 +3119,7 @@
                   <a:schemeClr val="bg1"/>
                 </a:solidFill>
               </a:rPr>
-              <a:t>“like your team of experts”: five gray avatars, CPA, designer, developer, copywriter, analyst</a:t>
+              <a:t>“your personal team of experts who trained their whole lives for their specific job” (gray icons)</a:t>
             </a:r>
             <a:endParaRPr lang="en-US" sz="1100" dirty="0"/>
           </a:p>
@@ -3177,7 +3177,7 @@
                   <a:schemeClr val="accent1"/>
                 </a:solidFill>
               </a:rPr>
-              <a:t>the five icons</a:t>
+              <a:t>“whole lives”</a:t>
             </a:r>
             <a:endParaRPr lang="en-US" sz="1200" dirty="0"/>
           </a:p>
@@ -3249,7 +3249,7 @@
                   <a:schemeClr val="accent1"/>
                 </a:solidFill>
               </a:rPr>
-              <a:t>the five icons</a:t>
+              <a:t>“whole lives”</a:t>
             </a:r>
             <a:endParaRPr lang="en-US" sz="1600" dirty="0"/>
           </a:p>
@@ -3321,7 +3321,7 @@
                   <a:schemeClr val="tx1"/>
                 </a:solidFill>
               </a:rPr>
-              <a:t>A CPA’s, a designer’s, a developer’s whole lives become icons. Nobody in this ad gets paid.</a:t>
+              <a:t>People trained their whole lives, and the ad turns them into gray icons. Nobody in it gets paid.</a:t>
             </a:r>
             <a:endParaRPr lang="en-US" sz="1600" dirty="0"/>
           </a:p>
@@ -3393,7 +3393,7 @@
                   <a:schemeClr val="accent4"/>
                 </a:solidFill>
               </a:rPr>
-              <a:t>“Your team of experts. Who’s paying them?”</a:t>
+              <a:t>“Their whole lives. Who’s paying them?”</a:t>
             </a:r>
             <a:endParaRPr lang="en-US" sz="1600" dirty="0"/>
           </a:p>
@@ -3502,7 +3502,7 @@
                 <a:ea typeface="Century Schoolbook" pitchFamily="34" charset="-122"/>
                 <a:cs typeface="Century Schoolbook" pitchFamily="34" charset="-120"/>
               </a:rPr>
-              <a:t>Shot 4 · their 0:41–0:50</a:t>
+              <a:t>Shot 4 · their 0:47–0:52</a:t>
             </a:r>
             <a:endParaRPr lang="en-US" sz="2200" dirty="0"/>
           </a:p>
@@ -3565,7 +3565,7 @@
                   <a:schemeClr val="bg1"/>
                 </a:solidFill>
               </a:rPr>
-              <a:t>P&amp;L dashboards, a $71,400 proposal</a:t>
+              <a:t>“a custom app tailored to my unique sales process” ($71,400 on screen)</a:t>
             </a:r>
             <a:endParaRPr lang="en-US" sz="1100" dirty="0"/>
           </a:p>
@@ -3623,7 +3623,7 @@
                   <a:schemeClr val="accent1"/>
                 </a:solidFill>
               </a:rPr>
-              <a:t>“$71,400”</a:t>
+              <a:t>“sales process”</a:t>
             </a:r>
             <a:endParaRPr lang="en-US" sz="1200" dirty="0"/>
           </a:p>
@@ -3695,7 +3695,7 @@
                   <a:schemeClr val="accent1"/>
                 </a:solidFill>
               </a:rPr>
-              <a:t>“$71,400”</a:t>
+              <a:t>“sales process”</a:t>
             </a:r>
             <a:endParaRPr lang="en-US" sz="1600" dirty="0"/>
           </a:p>
@@ -3767,7 +3767,7 @@
                   <a:schemeClr val="tx1"/>
                 </a:solidFill>
               </a:rPr>
-              <a:t>The hero result is a pitch. The machine makes sales for the next machine.</a:t>
+              <a:t>The hero result is a sales tool. The machine’s big win is a price quote.</a:t>
             </a:r>
             <a:endParaRPr lang="en-US" sz="1600" dirty="0"/>
           </a:p>
@@ -3948,7 +3948,7 @@
                 <a:ea typeface="Century Schoolbook" pitchFamily="34" charset="-122"/>
                 <a:cs typeface="Century Schoolbook" pitchFamily="34" charset="-120"/>
               </a:rPr>
-              <a:t>Shot 5 · their 0:51–0:66</a:t>
+              <a:t>Shot 5 · their 0:58–0:65</a:t>
             </a:r>
             <a:endParaRPr lang="en-US" sz="2200" dirty="0"/>
           </a:p>
@@ -4011,7 +4011,7 @@
                   <a:schemeClr val="bg1"/>
                 </a:solidFill>
               </a:rPr>
-              <a:t>“thousands of apps” · “context of all my work” · “until now”</a:t>
+              <a:t>“the full context of all my work, across all my apps … until now”</a:t>
             </a:r>
             <a:endParaRPr lang="en-US" sz="1100" dirty="0"/>
           </a:p>
@@ -4394,7 +4394,7 @@
                 <a:ea typeface="Century Schoolbook" pitchFamily="34" charset="-122"/>
                 <a:cs typeface="Century Schoolbook" pitchFamily="34" charset="-120"/>
               </a:rPr>
-              <a:t>Shot 6 · their 0:67</a:t>
+              <a:t>Shot 6 · their 0:66–0:67</a:t>
             </a:r>
             <a:endParaRPr lang="en-US" sz="2200" dirty="0"/>
           </a:p>
@@ -4457,7 +4457,7 @@
                   <a:schemeClr val="bg1"/>
                 </a:solidFill>
               </a:rPr>
-              <a:t>“try Computer.”</a:t>
+              <a:t>“Click the link below to try Computer.”</a:t>
             </a:r>
             <a:endParaRPr lang="en-US" sz="1100" dirty="0"/>
           </a:p>
